--- a/Early Detection of Lung Cancer Nodules through Capsule Neural Network (2).pptx
+++ b/Early Detection of Lung Cancer Nodules through Capsule Neural Network (2).pptx
@@ -221,7 +221,7 @@
           <a:p>
             <a:fld id="{95027B0B-E4EC-4817-B8AE-E1F5A0E43040}" type="datetimeFigureOut">
               <a:rPr lang="en-US" smtClean="0"/>
-              <a:t>4/6/2026</a:t>
+              <a:t>4/23/2026</a:t>
             </a:fld>
             <a:endParaRPr lang="en-US" dirty="0"/>
           </a:p>
@@ -1495,7 +1495,7 @@
           <a:p>
             <a:fld id="{2021EB0C-0560-453E-ACFF-9C455F55CF40}" type="datetimeFigureOut">
               <a:rPr lang="en-US" smtClean="0"/>
-              <a:t>4/6/2026</a:t>
+              <a:t>4/23/2026</a:t>
             </a:fld>
             <a:endParaRPr lang="en-US" dirty="0"/>
           </a:p>
@@ -1693,7 +1693,7 @@
           <a:p>
             <a:fld id="{2021EB0C-0560-453E-ACFF-9C455F55CF40}" type="datetimeFigureOut">
               <a:rPr lang="en-US" smtClean="0"/>
-              <a:t>4/6/2026</a:t>
+              <a:t>4/23/2026</a:t>
             </a:fld>
             <a:endParaRPr lang="en-US" dirty="0"/>
           </a:p>
@@ -1901,7 +1901,7 @@
           <a:p>
             <a:fld id="{2021EB0C-0560-453E-ACFF-9C455F55CF40}" type="datetimeFigureOut">
               <a:rPr lang="en-US" smtClean="0"/>
-              <a:t>4/6/2026</a:t>
+              <a:t>4/23/2026</a:t>
             </a:fld>
             <a:endParaRPr lang="en-US" dirty="0"/>
           </a:p>
@@ -2099,7 +2099,7 @@
           <a:p>
             <a:fld id="{2021EB0C-0560-453E-ACFF-9C455F55CF40}" type="datetimeFigureOut">
               <a:rPr lang="en-US" smtClean="0"/>
-              <a:t>4/6/2026</a:t>
+              <a:t>4/23/2026</a:t>
             </a:fld>
             <a:endParaRPr lang="en-US" dirty="0"/>
           </a:p>
@@ -2374,7 +2374,7 @@
           <a:p>
             <a:fld id="{2021EB0C-0560-453E-ACFF-9C455F55CF40}" type="datetimeFigureOut">
               <a:rPr lang="en-US" smtClean="0"/>
-              <a:t>4/6/2026</a:t>
+              <a:t>4/23/2026</a:t>
             </a:fld>
             <a:endParaRPr lang="en-US" dirty="0"/>
           </a:p>
@@ -2639,7 +2639,7 @@
           <a:p>
             <a:fld id="{2021EB0C-0560-453E-ACFF-9C455F55CF40}" type="datetimeFigureOut">
               <a:rPr lang="en-US" smtClean="0"/>
-              <a:t>4/6/2026</a:t>
+              <a:t>4/23/2026</a:t>
             </a:fld>
             <a:endParaRPr lang="en-US" dirty="0"/>
           </a:p>
@@ -3051,7 +3051,7 @@
           <a:p>
             <a:fld id="{2021EB0C-0560-453E-ACFF-9C455F55CF40}" type="datetimeFigureOut">
               <a:rPr lang="en-US" smtClean="0"/>
-              <a:t>4/6/2026</a:t>
+              <a:t>4/23/2026</a:t>
             </a:fld>
             <a:endParaRPr lang="en-US" dirty="0"/>
           </a:p>
@@ -3192,7 +3192,7 @@
           <a:p>
             <a:fld id="{2021EB0C-0560-453E-ACFF-9C455F55CF40}" type="datetimeFigureOut">
               <a:rPr lang="en-US" smtClean="0"/>
-              <a:t>4/6/2026</a:t>
+              <a:t>4/23/2026</a:t>
             </a:fld>
             <a:endParaRPr lang="en-US" dirty="0"/>
           </a:p>
@@ -3305,7 +3305,7 @@
           <a:p>
             <a:fld id="{2021EB0C-0560-453E-ACFF-9C455F55CF40}" type="datetimeFigureOut">
               <a:rPr lang="en-US" smtClean="0"/>
-              <a:t>4/6/2026</a:t>
+              <a:t>4/23/2026</a:t>
             </a:fld>
             <a:endParaRPr lang="en-US" dirty="0"/>
           </a:p>
@@ -3616,7 +3616,7 @@
           <a:p>
             <a:fld id="{2021EB0C-0560-453E-ACFF-9C455F55CF40}" type="datetimeFigureOut">
               <a:rPr lang="en-US" smtClean="0"/>
-              <a:t>4/6/2026</a:t>
+              <a:t>4/23/2026</a:t>
             </a:fld>
             <a:endParaRPr lang="en-US" dirty="0"/>
           </a:p>
@@ -3904,7 +3904,7 @@
           <a:p>
             <a:fld id="{2021EB0C-0560-453E-ACFF-9C455F55CF40}" type="datetimeFigureOut">
               <a:rPr lang="en-US" smtClean="0"/>
-              <a:t>4/6/2026</a:t>
+              <a:t>4/23/2026</a:t>
             </a:fld>
             <a:endParaRPr lang="en-US" dirty="0"/>
           </a:p>
@@ -4145,7 +4145,7 @@
           <a:p>
             <a:fld id="{2021EB0C-0560-453E-ACFF-9C455F55CF40}" type="datetimeFigureOut">
               <a:rPr lang="en-US" smtClean="0"/>
-              <a:t>4/6/2026</a:t>
+              <a:t>4/23/2026</a:t>
             </a:fld>
             <a:endParaRPr lang="en-US" dirty="0"/>
           </a:p>
@@ -10206,63 +10206,7 @@
                 <a:latin typeface="Times New Roman" panose="02020603050405020304" pitchFamily="18" charset="0"/>
                 <a:cs typeface="Times New Roman" panose="02020603050405020304" pitchFamily="18" charset="0"/>
               </a:rPr>
-              <a:t>    Existing CNN-based methods for lung nodule detection achieve 85%–96.9% accuracy but suffer from spatial information loss due to pooling layers, high false-positive rates of approximately 1 per scan, and poor generalization across different clinical environments (Ma et al., 2024; Hendrix et al., 2023; Shin et al., 2016). Capsule Neural Networks preserve spatial hierarchies through dynamic routing (</a:t>
-            </a:r>
-            <a:r>
-              <a:rPr lang="en-US" sz="2000" dirty="0" err="1">
-                <a:latin typeface="Times New Roman" panose="02020603050405020304" pitchFamily="18" charset="0"/>
-                <a:cs typeface="Times New Roman" panose="02020603050405020304" pitchFamily="18" charset="0"/>
-              </a:rPr>
-              <a:t>Sabour</a:t>
-            </a:r>
-            <a:r>
-              <a:rPr lang="en-US" sz="2000" dirty="0">
-                <a:latin typeface="Times New Roman" panose="02020603050405020304" pitchFamily="18" charset="0"/>
-                <a:cs typeface="Times New Roman" panose="02020603050405020304" pitchFamily="18" charset="0"/>
-              </a:rPr>
-              <a:t> et al., 2017), yet no study has applied or compared </a:t>
-            </a:r>
-            <a:r>
-              <a:rPr lang="en-US" sz="2000" dirty="0" err="1">
-                <a:latin typeface="Times New Roman" panose="02020603050405020304" pitchFamily="18" charset="0"/>
-                <a:cs typeface="Times New Roman" panose="02020603050405020304" pitchFamily="18" charset="0"/>
-              </a:rPr>
-              <a:t>CapsNets</a:t>
-            </a:r>
-            <a:r>
-              <a:rPr lang="en-US" sz="2000" dirty="0">
-                <a:latin typeface="Times New Roman" panose="02020603050405020304" pitchFamily="18" charset="0"/>
-                <a:cs typeface="Times New Roman" panose="02020603050405020304" pitchFamily="18" charset="0"/>
-              </a:rPr>
-              <a:t> against CNNs specifically for lung nodule detection (</a:t>
-            </a:r>
-            <a:r>
-              <a:rPr lang="en-US" sz="2000" dirty="0" err="1">
-                <a:latin typeface="Times New Roman" panose="02020603050405020304" pitchFamily="18" charset="0"/>
-                <a:cs typeface="Times New Roman" panose="02020603050405020304" pitchFamily="18" charset="0"/>
-              </a:rPr>
-              <a:t>Xue</a:t>
-            </a:r>
-            <a:r>
-              <a:rPr lang="en-US" sz="2000" dirty="0">
-                <a:latin typeface="Times New Roman" panose="02020603050405020304" pitchFamily="18" charset="0"/>
-                <a:cs typeface="Times New Roman" panose="02020603050405020304" pitchFamily="18" charset="0"/>
-              </a:rPr>
-              <a:t> et al., 2025). This study addresses this gap by evaluating a </a:t>
-            </a:r>
-            <a:r>
-              <a:rPr lang="en-US" sz="2000" dirty="0" err="1">
-                <a:latin typeface="Times New Roman" panose="02020603050405020304" pitchFamily="18" charset="0"/>
-                <a:cs typeface="Times New Roman" panose="02020603050405020304" pitchFamily="18" charset="0"/>
-              </a:rPr>
-              <a:t>CapsNet</a:t>
-            </a:r>
-            <a:r>
-              <a:rPr lang="en-US" sz="2000" dirty="0">
-                <a:latin typeface="Times New Roman" panose="02020603050405020304" pitchFamily="18" charset="0"/>
-                <a:cs typeface="Times New Roman" panose="02020603050405020304" pitchFamily="18" charset="0"/>
-              </a:rPr>
-              <a:t>-based approach for early lung nodule detection.</a:t>
+              <a:t>Early detection of lung cancer nodules remains challenging despite deep learning models achieving accuracy levels of approximately 85%–96%. This is mainly caused by the small size and low contrast of nodules, as well as limitations in convolutional neural networks, where pooling operations lead to loss of spatial information. As a result, existing systems still produce around one false positive per scan and may miss subtle nodules. Additionally, variations in imaging data across clinical environments reduce model generalization. These issues indicate a need for more effective approaches that can preserve spatial relationships and improve detection reliability.</a:t>
             </a:r>
             <a:endParaRPr lang="en-US" sz="2000" dirty="0">
               <a:solidFill>
